--- a/paid-workshop-assets/Four_States_Quadrant_v1.0.pptx
+++ b/paid-workshop-assets/Four_States_Quadrant_v1.0.pptx
@@ -3105,7 +3105,7 @@
         <p:spPr>
           <a:xfrm>
             <a:off x="658368" y="502920"/>
-            <a:ext cx="10872216" cy="384048"/>
+            <a:ext cx="10874959" cy="411480"/>
           </a:xfrm>
           <a:prstGeom prst="rect">
             <a:avLst/>
@@ -3113,14 +3113,14 @@
           <a:noFill/>
         </p:spPr>
         <p:txBody>
-          <a:bodyPr wrap="square" lIns="0" rIns="0" tIns="0" bIns="0">
+          <a:bodyPr wrap="square" lIns="0" rIns="0" tIns="0" bIns="0" anchor="ctr">
             <a:spAutoFit/>
           </a:bodyPr>
           <a:lstStyle/>
           <a:p>
             <a:pPr algn="ctr"/>
             <a:r>
-              <a:rPr sz="2000" b="1" i="0" spc="180">
+              <a:rPr sz="2000" b="1" spc="180">
                 <a:solidFill>
                   <a:srgbClr val="0F2347"/>
                 </a:solidFill>
@@ -3139,8 +3139,8 @@
         </p:nvSpPr>
         <p:spPr>
           <a:xfrm>
-            <a:off x="658368" y="914400"/>
-            <a:ext cx="10872216" cy="347472"/>
+            <a:off x="658368" y="960120"/>
+            <a:ext cx="10874959" cy="365760"/>
           </a:xfrm>
           <a:prstGeom prst="rect">
             <a:avLst/>
@@ -3148,14 +3148,14 @@
           <a:noFill/>
         </p:spPr>
         <p:txBody>
-          <a:bodyPr wrap="square" lIns="0" rIns="0" tIns="0" bIns="0">
+          <a:bodyPr wrap="square" lIns="0" rIns="0" tIns="0" bIns="0" anchor="ctr">
             <a:spAutoFit/>
           </a:bodyPr>
           <a:lstStyle/>
           <a:p>
             <a:pPr algn="ctr"/>
             <a:r>
-              <a:rPr sz="1400" b="0" i="0">
+              <a:rPr sz="1400" b="0">
                 <a:solidFill>
                   <a:srgbClr val="4A4A4A"/>
                 </a:solidFill>
@@ -3174,8 +3174,8 @@
         </p:nvSpPr>
         <p:spPr>
           <a:xfrm>
-            <a:off x="1097280" y="1737360"/>
-            <a:ext cx="4860036" cy="1851659"/>
+            <a:off x="1051560" y="1600200"/>
+            <a:ext cx="4905755" cy="1943100"/>
           </a:xfrm>
           <a:prstGeom prst="rect">
             <a:avLst/>
@@ -3218,8 +3218,8 @@
         </p:nvSpPr>
         <p:spPr>
           <a:xfrm>
-            <a:off x="1097280" y="2240280"/>
-            <a:ext cx="4860036" cy="822960"/>
+            <a:off x="1234439" y="1828800"/>
+            <a:ext cx="4539995" cy="685800"/>
           </a:xfrm>
           <a:prstGeom prst="rect">
             <a:avLst/>
@@ -3234,7 +3234,7 @@
           <a:p>
             <a:pPr algn="ctr"/>
             <a:r>
-              <a:rPr sz="3200" b="1" spc="150">
+              <a:rPr sz="3000" b="1" spc="150">
                 <a:solidFill>
                   <a:srgbClr val="F5F0E8"/>
                 </a:solidFill>
@@ -3253,8 +3253,8 @@
         </p:nvSpPr>
         <p:spPr>
           <a:xfrm>
-            <a:off x="1371600" y="3154680"/>
-            <a:ext cx="4311396" cy="1097280"/>
+            <a:off x="1325880" y="2514600"/>
+            <a:ext cx="4357116" cy="731520"/>
           </a:xfrm>
           <a:prstGeom prst="rect">
             <a:avLst/>
@@ -3271,9 +3271,15 @@
               <a:lnSpc>
                 <a:spcPct val="120000"/>
               </a:lnSpc>
+              <a:spcBef>
+                <a:spcPts val="0"/>
+              </a:spcBef>
+              <a:spcAft>
+                <a:spcPts val="0"/>
+              </a:spcAft>
             </a:pPr>
             <a:r>
-              <a:rPr sz="1500">
+              <a:rPr sz="1400">
                 <a:solidFill>
                   <a:srgbClr val="F5F0E8"/>
                 </a:solidFill>
@@ -3287,9 +3293,15 @@
               <a:lnSpc>
                 <a:spcPct val="120000"/>
               </a:lnSpc>
+              <a:spcBef>
+                <a:spcPts val="0"/>
+              </a:spcBef>
+              <a:spcAft>
+                <a:spcPts val="0"/>
+              </a:spcAft>
             </a:pPr>
             <a:r>
-              <a:rPr sz="1500">
+              <a:rPr sz="1400">
                 <a:solidFill>
                   <a:srgbClr val="F5F0E8"/>
                 </a:solidFill>
@@ -3308,8 +3320,8 @@
         </p:nvSpPr>
         <p:spPr>
           <a:xfrm>
-            <a:off x="6231636" y="1737360"/>
-            <a:ext cx="4860036" cy="1851659"/>
+            <a:off x="6231636" y="1600200"/>
+            <a:ext cx="4905755" cy="1943100"/>
           </a:xfrm>
           <a:prstGeom prst="rect">
             <a:avLst/>
@@ -3352,8 +3364,8 @@
         </p:nvSpPr>
         <p:spPr>
           <a:xfrm>
-            <a:off x="6231636" y="2240280"/>
-            <a:ext cx="4860036" cy="822960"/>
+            <a:off x="6414516" y="1828800"/>
+            <a:ext cx="4539995" cy="685800"/>
           </a:xfrm>
           <a:prstGeom prst="rect">
             <a:avLst/>
@@ -3368,7 +3380,7 @@
           <a:p>
             <a:pPr algn="ctr"/>
             <a:r>
-              <a:rPr sz="3200" b="1" spc="150">
+              <a:rPr sz="3000" b="1" spc="150">
                 <a:solidFill>
                   <a:srgbClr val="F5F0E8"/>
                 </a:solidFill>
@@ -3387,8 +3399,8 @@
         </p:nvSpPr>
         <p:spPr>
           <a:xfrm>
-            <a:off x="6505956" y="3154680"/>
-            <a:ext cx="4311396" cy="1097280"/>
+            <a:off x="6505955" y="2514600"/>
+            <a:ext cx="4357116" cy="731520"/>
           </a:xfrm>
           <a:prstGeom prst="rect">
             <a:avLst/>
@@ -3405,9 +3417,15 @@
               <a:lnSpc>
                 <a:spcPct val="120000"/>
               </a:lnSpc>
+              <a:spcBef>
+                <a:spcPts val="0"/>
+              </a:spcBef>
+              <a:spcAft>
+                <a:spcPts val="0"/>
+              </a:spcAft>
             </a:pPr>
             <a:r>
-              <a:rPr sz="1500">
+              <a:rPr sz="1400">
                 <a:solidFill>
                   <a:srgbClr val="F5F0E8"/>
                 </a:solidFill>
@@ -3421,9 +3439,15 @@
               <a:lnSpc>
                 <a:spcPct val="120000"/>
               </a:lnSpc>
+              <a:spcBef>
+                <a:spcPts val="0"/>
+              </a:spcBef>
+              <a:spcAft>
+                <a:spcPts val="0"/>
+              </a:spcAft>
             </a:pPr>
             <a:r>
-              <a:rPr sz="1500">
+              <a:rPr sz="1400">
                 <a:solidFill>
                   <a:srgbClr val="F5F0E8"/>
                 </a:solidFill>
@@ -3442,8 +3466,8 @@
         </p:nvSpPr>
         <p:spPr>
           <a:xfrm>
-            <a:off x="1097280" y="3863339"/>
-            <a:ext cx="4860036" cy="1851659"/>
+            <a:off x="1051560" y="3817620"/>
+            <a:ext cx="4905755" cy="1943100"/>
           </a:xfrm>
           <a:prstGeom prst="rect">
             <a:avLst/>
@@ -3486,8 +3510,8 @@
         </p:nvSpPr>
         <p:spPr>
           <a:xfrm>
-            <a:off x="1097280" y="4366259"/>
-            <a:ext cx="4860036" cy="822960"/>
+            <a:off x="1234439" y="4046220"/>
+            <a:ext cx="4539995" cy="685800"/>
           </a:xfrm>
           <a:prstGeom prst="rect">
             <a:avLst/>
@@ -3502,7 +3526,7 @@
           <a:p>
             <a:pPr algn="ctr"/>
             <a:r>
-              <a:rPr sz="3200" b="1" spc="150">
+              <a:rPr sz="3000" b="1" spc="150">
                 <a:solidFill>
                   <a:srgbClr val="F5F0E8"/>
                 </a:solidFill>
@@ -3521,8 +3545,8 @@
         </p:nvSpPr>
         <p:spPr>
           <a:xfrm>
-            <a:off x="1371600" y="5280659"/>
-            <a:ext cx="4311396" cy="1097280"/>
+            <a:off x="1325880" y="4732020"/>
+            <a:ext cx="4357116" cy="731520"/>
           </a:xfrm>
           <a:prstGeom prst="rect">
             <a:avLst/>
@@ -3539,9 +3563,15 @@
               <a:lnSpc>
                 <a:spcPct val="120000"/>
               </a:lnSpc>
+              <a:spcBef>
+                <a:spcPts val="0"/>
+              </a:spcBef>
+              <a:spcAft>
+                <a:spcPts val="0"/>
+              </a:spcAft>
             </a:pPr>
             <a:r>
-              <a:rPr sz="1500">
+              <a:rPr sz="1400">
                 <a:solidFill>
                   <a:srgbClr val="F5F0E8"/>
                 </a:solidFill>
@@ -3555,9 +3585,15 @@
               <a:lnSpc>
                 <a:spcPct val="120000"/>
               </a:lnSpc>
+              <a:spcBef>
+                <a:spcPts val="0"/>
+              </a:spcBef>
+              <a:spcAft>
+                <a:spcPts val="0"/>
+              </a:spcAft>
             </a:pPr>
             <a:r>
-              <a:rPr sz="1500">
+              <a:rPr sz="1400">
                 <a:solidFill>
                   <a:srgbClr val="F5F0E8"/>
                 </a:solidFill>
@@ -3576,8 +3612,8 @@
         </p:nvSpPr>
         <p:spPr>
           <a:xfrm>
-            <a:off x="6231636" y="3863339"/>
-            <a:ext cx="4860036" cy="1851659"/>
+            <a:off x="6231636" y="3817620"/>
+            <a:ext cx="4905755" cy="1943100"/>
           </a:xfrm>
           <a:prstGeom prst="rect">
             <a:avLst/>
@@ -3620,8 +3656,8 @@
         </p:nvSpPr>
         <p:spPr>
           <a:xfrm>
-            <a:off x="6231636" y="4366259"/>
-            <a:ext cx="4860036" cy="822960"/>
+            <a:off x="6414516" y="4046220"/>
+            <a:ext cx="4539995" cy="685800"/>
           </a:xfrm>
           <a:prstGeom prst="rect">
             <a:avLst/>
@@ -3636,7 +3672,7 @@
           <a:p>
             <a:pPr algn="ctr"/>
             <a:r>
-              <a:rPr sz="3200" b="1" spc="150">
+              <a:rPr sz="3000" b="1" spc="150">
                 <a:solidFill>
                   <a:srgbClr val="F5F0E8"/>
                 </a:solidFill>
@@ -3655,8 +3691,8 @@
         </p:nvSpPr>
         <p:spPr>
           <a:xfrm>
-            <a:off x="6505956" y="5280659"/>
-            <a:ext cx="4311396" cy="1097280"/>
+            <a:off x="6505955" y="4732020"/>
+            <a:ext cx="4357116" cy="731520"/>
           </a:xfrm>
           <a:prstGeom prst="rect">
             <a:avLst/>
@@ -3673,9 +3709,15 @@
               <a:lnSpc>
                 <a:spcPct val="120000"/>
               </a:lnSpc>
+              <a:spcBef>
+                <a:spcPts val="0"/>
+              </a:spcBef>
+              <a:spcAft>
+                <a:spcPts val="0"/>
+              </a:spcAft>
             </a:pPr>
             <a:r>
-              <a:rPr sz="1500">
+              <a:rPr sz="1400">
                 <a:solidFill>
                   <a:srgbClr val="F5F0E8"/>
                 </a:solidFill>
@@ -3689,9 +3731,15 @@
               <a:lnSpc>
                 <a:spcPct val="120000"/>
               </a:lnSpc>
+              <a:spcBef>
+                <a:spcPts val="0"/>
+              </a:spcBef>
+              <a:spcAft>
+                <a:spcPts val="0"/>
+              </a:spcAft>
             </a:pPr>
             <a:r>
-              <a:rPr sz="1500">
+              <a:rPr sz="1400">
                 <a:solidFill>
                   <a:srgbClr val="F5F0E8"/>
                 </a:solidFill>
@@ -3710,8 +3758,8 @@
         </p:nvSpPr>
         <p:spPr>
           <a:xfrm>
-            <a:off x="658368" y="5989320"/>
-            <a:ext cx="10872216" cy="384048"/>
+            <a:off x="658368" y="6080760"/>
+            <a:ext cx="10874959" cy="411480"/>
           </a:xfrm>
           <a:prstGeom prst="rect">
             <a:avLst/>
@@ -3719,14 +3767,14 @@
           <a:noFill/>
         </p:spPr>
         <p:txBody>
-          <a:bodyPr wrap="square" lIns="0" rIns="0" tIns="0" bIns="0">
+          <a:bodyPr wrap="square" lIns="0" rIns="0" tIns="0" bIns="0" anchor="ctr">
             <a:spAutoFit/>
           </a:bodyPr>
           <a:lstStyle/>
           <a:p>
             <a:pPr algn="ctr"/>
             <a:r>
-              <a:rPr sz="1500" b="1" i="0">
+              <a:rPr sz="1500" b="1">
                 <a:solidFill>
                   <a:srgbClr val="0F2347"/>
                 </a:solidFill>
